--- a/04.30_final.pptx
+++ b/04.30_final.pptx
@@ -2749,7 +2749,7 @@
           <a:p>
             <a:fld id="{D33C71F8-677C-C248-8DFE-6D4E69688B0A}" type="datetimeFigureOut">
               <a:rPr lang="en-US" smtClean="0"/>
-              <a:t>4/23/26</a:t>
+              <a:t>4/28/26</a:t>
             </a:fld>
             <a:endParaRPr lang="en-US"/>
           </a:p>
@@ -3267,7 +3267,7 @@
             </a:r>
           </a:p>
           <a:p>
-            <a:pPr marL="171450" indent="-171450">
+            <a:pPr marL="628650" lvl="1" indent="-171450">
               <a:buFontTx/>
               <a:buChar char="-"/>
             </a:pPr>
@@ -3281,11 +3281,11 @@
                 <a:ea typeface="+mn-ea"/>
                 <a:cs typeface="+mn-cs"/>
               </a:rPr>
-              <a:t>This analysis uses internal force plate data from Notre Dame Athletics, as well as the official travel itinerary from each softball trip to fill in flight and schedule data.</a:t>
-            </a:r>
-          </a:p>
-          <a:p>
-            <a:pPr marL="171450" indent="-171450">
+              <a:t>This analysis uses force plate data from Notre Dame Athletics, as well as the official travel itinerary from each softball trip.</a:t>
+            </a:r>
+          </a:p>
+          <a:p>
+            <a:pPr marL="171450" lvl="0" indent="-171450">
               <a:buFontTx/>
               <a:buChar char="-"/>
             </a:pPr>
@@ -3299,7 +3299,7 @@
                 <a:ea typeface="+mn-ea"/>
                 <a:cs typeface="+mn-cs"/>
               </a:rPr>
-              <a:t>The outputs include two baseline random forest models; two XGBoost models; a feature significance plot for the best-performing model; visualizations showing the relationships between key variables; and this report summarizing the methods.</a:t>
+              <a:t>The outputs include two baseline random forest models and two XGBoost models, with one of the XGBoost performing best.</a:t>
             </a:r>
           </a:p>
         </p:txBody>
@@ -3398,7 +3398,7 @@
                 <a:ea typeface="+mn-ea"/>
                 <a:cs typeface="+mn-cs"/>
               </a:rPr>
-              <a:t>The main dataset contained travel metrics that were transformed into stress functions that measured everything from time zones crossed and direction (east or west) to the total distance and travel time in minutes. Other factors included transit type, trip length, return time to campus, and turnaround time, or the number of days before the next trip</a:t>
+              <a:t>The main dataset contained travel metrics that were transformed into stress functions that measured everything from time zones crossed and direction to the total distance and travel time. Other factors included transit type, trip length, return time to campus, and turnaround time before the next trip.</a:t>
             </a:r>
           </a:p>
           <a:p>
@@ -3452,11 +3452,11 @@
                 <a:ea typeface="+mn-ea"/>
                 <a:cs typeface="+mn-cs"/>
               </a:rPr>
-              <a:t>Peak power (measure of force applied by the athlete into the force plate) and date tracked physical fatigue by day, sorted by athlete ID.</a:t>
-            </a:r>
-          </a:p>
-          <a:p>
-            <a:pPr marL="628650" lvl="1" indent="-171450">
+              <a:t>Because peak power varied drastically by body weight and position, z-score of peak power provided a better baseline by capturing variation relative to each athlete’s pre-season average jump score.</a:t>
+            </a:r>
+          </a:p>
+          <a:p>
+            <a:pPr marL="171450" lvl="0" indent="-171450">
               <a:buFontTx/>
               <a:buChar char="-"/>
             </a:pPr>
@@ -3470,43 +3470,7 @@
                 <a:ea typeface="+mn-ea"/>
                 <a:cs typeface="+mn-cs"/>
               </a:rPr>
-              <a:t>However, because peak power varied drastically by body weight and position, z-score of peak power provided a better baseline by capturing variation relative to each athlete’s average.</a:t>
-            </a:r>
-          </a:p>
-          <a:p>
-            <a:pPr marL="628650" lvl="1" indent="-171450">
-              <a:buFontTx/>
-              <a:buChar char="-"/>
-            </a:pPr>
-            <a:r>
-              <a:rPr lang="en-US" sz="1200" kern="1200" dirty="0">
-                <a:solidFill>
-                  <a:schemeClr val="tx1"/>
-                </a:solidFill>
-                <a:effectLst/>
-                <a:latin typeface="+mn-lt"/>
-                <a:ea typeface="+mn-ea"/>
-                <a:cs typeface="+mn-cs"/>
-              </a:rPr>
-              <a:t>Because there were only 21 members on the softball team, the sample size was small but could provide a signal for further data exploration.</a:t>
-            </a:r>
-          </a:p>
-          <a:p>
-            <a:pPr marL="171450" lvl="0" indent="-171450">
-              <a:buFontTx/>
-              <a:buChar char="-"/>
-            </a:pPr>
-            <a:r>
-              <a:rPr lang="en-US" sz="1200" kern="1200" dirty="0">
-                <a:solidFill>
-                  <a:schemeClr val="tx1"/>
-                </a:solidFill>
-                <a:effectLst/>
-                <a:latin typeface="+mn-lt"/>
-                <a:ea typeface="+mn-ea"/>
-                <a:cs typeface="+mn-cs"/>
-              </a:rPr>
-              <a:t>There were a total of 623 pre-season jumps from August 1, 2025, until February 4, 2026, and 328 in-season jumps from February 5, 2026, until April 18, 2026, recorded.</a:t>
+              <a:t>There were a total of 623 pre-season jumps from August 1 until February 4, and 328 in-season jumps from February 5 until April 18.</a:t>
             </a:r>
           </a:p>
         </p:txBody>
@@ -3649,38 +3613,7 @@
                 <a:ea typeface="+mn-ea"/>
                 <a:cs typeface="+mn-cs"/>
               </a:rPr>
-              <a:t>All jumps from the first workout in August until the first travel day in February were extracted to create a baseline for peak power from which the z-score would vary during the season.</a:t>
-            </a:r>
-          </a:p>
-          <a:p>
-            <a:pPr marL="628650" marR="0" lvl="1" indent="-171450" algn="l" defTabSz="914400" rtl="0" eaLnBrk="1" fontAlgn="auto" latinLnBrk="0" hangingPunct="1">
-              <a:lnSpc>
-                <a:spcPct val="100000"/>
-              </a:lnSpc>
-              <a:spcBef>
-                <a:spcPts val="0"/>
-              </a:spcBef>
-              <a:spcAft>
-                <a:spcPts val="0"/>
-              </a:spcAft>
-              <a:buClrTx/>
-              <a:buSzTx/>
-              <a:buFontTx/>
-              <a:buChar char="-"/>
-              <a:tabLst/>
-              <a:defRPr/>
-            </a:pPr>
-            <a:r>
-              <a:rPr lang="en-US" sz="1200" kern="1200" dirty="0">
-                <a:solidFill>
-                  <a:schemeClr val="tx1"/>
-                </a:solidFill>
-                <a:effectLst/>
-                <a:latin typeface="+mn-lt"/>
-                <a:ea typeface="+mn-ea"/>
-                <a:cs typeface="+mn-cs"/>
-              </a:rPr>
-              <a:t>Athlete instances were then created from only spring data, and players were clustered into five groups based on response variation from the fall baseline.</a:t>
+              <a:t>Athlete instances were then created from only spring data, and players were clustered into five groups based on response variation from their fall baseline.</a:t>
             </a:r>
           </a:p>
           <a:p>
@@ -3711,7 +3644,7 @@
                 <a:ea typeface="+mn-ea"/>
                 <a:cs typeface="+mn-cs"/>
               </a:rPr>
-              <a:t>These clusters represented varying levels of fatigue sensitivity: highly-sensitive, sensitive, moderate-response, resilient, and highly-resilient.</a:t>
+              <a:t>The resulting clusters represented varying levels of fatigue sensitivity: highly-sensitive, sensitive, moderate-response, resilient, and highly-resilient.</a:t>
             </a:r>
           </a:p>
           <a:p>
@@ -3889,6 +3822,37 @@
             </a:r>
           </a:p>
           <a:p>
+            <a:pPr marL="171450" marR="0" lvl="0" indent="-171450" algn="l" defTabSz="914400" rtl="0" eaLnBrk="1" fontAlgn="auto" latinLnBrk="0" hangingPunct="1">
+              <a:lnSpc>
+                <a:spcPct val="100000"/>
+              </a:lnSpc>
+              <a:spcBef>
+                <a:spcPts val="0"/>
+              </a:spcBef>
+              <a:spcAft>
+                <a:spcPts val="0"/>
+              </a:spcAft>
+              <a:buClrTx/>
+              <a:buSzTx/>
+              <a:buFontTx/>
+              <a:buChar char="-"/>
+              <a:tabLst/>
+              <a:defRPr/>
+            </a:pPr>
+            <a:r>
+              <a:rPr lang="en-US" sz="1200" kern="1200" dirty="0">
+                <a:solidFill>
+                  <a:schemeClr val="tx1"/>
+                </a:solidFill>
+                <a:effectLst/>
+                <a:latin typeface="+mn-lt"/>
+                <a:ea typeface="+mn-ea"/>
+                <a:cs typeface="+mn-cs"/>
+              </a:rPr>
+              <a:t>The model outputted an RMSE of 1.48, MAE of 1.04, and R-squared of 0.05.</a:t>
+            </a:r>
+          </a:p>
+          <a:p>
             <a:pPr marL="628650" marR="0" lvl="1" indent="-171450" algn="l" defTabSz="914400" rtl="0" eaLnBrk="1" fontAlgn="auto" latinLnBrk="0" hangingPunct="1">
               <a:lnSpc>
                 <a:spcPct val="100000"/>
@@ -3916,7 +3880,7 @@
                 <a:ea typeface="+mn-ea"/>
                 <a:cs typeface="+mn-cs"/>
               </a:rPr>
-              <a:t>It ran 200 estimators with a maximum depth of three to balance complexity and generalization. A learning rate of 0.05 allowed for gradual learning across many trees, while a subsample value of 0.8 introduced randomness to help lessen overfitting.</a:t>
+              <a:t>These values all indicated weak predictive performance, which was a key issue in the analysis. However, given the small sample size at the athlete level, the model is better suited to signal coaches and administrators toward capabilities with a larger sample size.</a:t>
             </a:r>
           </a:p>
           <a:p>
@@ -3948,68 +3912,6 @@
                 <a:cs typeface="+mn-cs"/>
               </a:rPr>
               <a:t>The top chart shows a sample output from the model, predicting athlete 35’s jump metrics from the first week of the season on.</a:t>
-            </a:r>
-          </a:p>
-          <a:p>
-            <a:pPr marL="171450" marR="0" lvl="0" indent="-171450" algn="l" defTabSz="914400" rtl="0" eaLnBrk="1" fontAlgn="auto" latinLnBrk="0" hangingPunct="1">
-              <a:lnSpc>
-                <a:spcPct val="100000"/>
-              </a:lnSpc>
-              <a:spcBef>
-                <a:spcPts val="0"/>
-              </a:spcBef>
-              <a:spcAft>
-                <a:spcPts val="0"/>
-              </a:spcAft>
-              <a:buClrTx/>
-              <a:buSzTx/>
-              <a:buFontTx/>
-              <a:buChar char="-"/>
-              <a:tabLst/>
-              <a:defRPr/>
-            </a:pPr>
-            <a:r>
-              <a:rPr lang="en-US" sz="1200" kern="1200" dirty="0">
-                <a:solidFill>
-                  <a:schemeClr val="tx1"/>
-                </a:solidFill>
-                <a:effectLst/>
-                <a:latin typeface="+mn-lt"/>
-                <a:ea typeface="+mn-ea"/>
-                <a:cs typeface="+mn-cs"/>
-              </a:rPr>
-              <a:t>The model outputted an RMSE of 1.4767, MAE of 1.0372, and R-squared of 0.0500.</a:t>
-            </a:r>
-          </a:p>
-          <a:p>
-            <a:pPr marL="628650" marR="0" lvl="1" indent="-171450" algn="l" defTabSz="914400" rtl="0" eaLnBrk="1" fontAlgn="auto" latinLnBrk="0" hangingPunct="1">
-              <a:lnSpc>
-                <a:spcPct val="100000"/>
-              </a:lnSpc>
-              <a:spcBef>
-                <a:spcPts val="0"/>
-              </a:spcBef>
-              <a:spcAft>
-                <a:spcPts val="0"/>
-              </a:spcAft>
-              <a:buClrTx/>
-              <a:buSzTx/>
-              <a:buFontTx/>
-              <a:buChar char="-"/>
-              <a:tabLst/>
-              <a:defRPr/>
-            </a:pPr>
-            <a:r>
-              <a:rPr lang="en-US" sz="1200" kern="1200" dirty="0">
-                <a:solidFill>
-                  <a:schemeClr val="tx1"/>
-                </a:solidFill>
-                <a:effectLst/>
-                <a:latin typeface="+mn-lt"/>
-                <a:ea typeface="+mn-ea"/>
-                <a:cs typeface="+mn-cs"/>
-              </a:rPr>
-              <a:t>These values all indicated weak predictive performance, which was a key issue in the analysis. However, given the small sample size at the athlete level, the models were better suited to signal coaches and administrators toward capabilities with a larger sample size.</a:t>
             </a:r>
           </a:p>
         </p:txBody>
@@ -4126,11 +4028,11 @@
                 <a:ea typeface="+mn-ea"/>
                 <a:cs typeface="+mn-cs"/>
               </a:rPr>
-              <a:t>The binary variable of commercial return flight had the most predictive power because trips with a commercial flight back also involved a bus from Chicago to campus, often resulting in a much later return time.</a:t>
-            </a:r>
-          </a:p>
-          <a:p>
-            <a:pPr marL="628650" lvl="1" indent="-171450">
+              <a:t>The binary variable of commercial return flight had the most predictive power likely because trips with a commercial flight back also involved a bus ride from Chicago to campus, resulting in a much later return time.</a:t>
+            </a:r>
+          </a:p>
+          <a:p>
+            <a:pPr marL="171450" lvl="0" indent="-171450">
               <a:buFontTx/>
               <a:buChar char="-"/>
             </a:pPr>
@@ -4144,11 +4046,11 @@
                 <a:ea typeface="+mn-ea"/>
                 <a:cs typeface="+mn-cs"/>
               </a:rPr>
-              <a:t>Multiple components compiled into commercial flights for Notre Dame student-athletes because of the lack of a major commercial airport near campus.</a:t>
-            </a:r>
-          </a:p>
-          <a:p>
-            <a:pPr marL="171450" lvl="0" indent="-171450">
+              <a:t>By contrast, the least predictive variables were whether a commercial flight was taken to the away series and the individual travel functions, like the Logistics Score and Travel Load Score.</a:t>
+            </a:r>
+          </a:p>
+          <a:p>
+            <a:pPr marL="628650" lvl="1" indent="-171450">
               <a:buFontTx/>
               <a:buChar char="-"/>
             </a:pPr>
@@ -4162,7 +4064,7 @@
                 <a:ea typeface="+mn-ea"/>
                 <a:cs typeface="+mn-cs"/>
               </a:rPr>
-              <a:t>By contrast, the least predictive variables included whether a commercial flight was taken to the away series and the individual travel functions, like the Logistics Score and Travel Load Score. The low scores for these travel functions may have resulted because they were included in the overall Trip Score.</a:t>
+              <a:t>The low scores for these travel functions may have resulted because they were included in the overall Trip Score.</a:t>
             </a:r>
           </a:p>
         </p:txBody>
@@ -4479,7 +4381,7 @@
                 <a:ea typeface="+mn-ea"/>
                 <a:cs typeface="+mn-cs"/>
               </a:rPr>
-              <a:t>From this information, coaches can form training plans based on the habits of highly-resilient players; for example, these fatigue-resistant athletes could share their sleep or nutrition habits with teammates who are more sensitive to travel effects.</a:t>
+              <a:t>From this information, coaches can form training plans based on the habits of highly-resilient players; for example, fatigue-resistant athletes could share their sleep or nutrition habits with teammates who are more sensitive to travel.</a:t>
             </a:r>
           </a:p>
           <a:p>
@@ -4541,25 +4443,7 @@
                 <a:ea typeface="+mn-ea"/>
                 <a:cs typeface="+mn-cs"/>
               </a:rPr>
-              <a:t>Because variables such as RTL and CRTL did not meaningfully improve model performance, it suggests that accumulated load may be less informative than immediate recovery conditions post-travel. This is consistent with the idea that, when athletes have more demanding travel back to campus, they go into their next week fatigued, starting the next training block at a disadvantage.</a:t>
-            </a:r>
-          </a:p>
-          <a:p>
-            <a:pPr marL="628650" lvl="1" indent="-171450">
-              <a:buFontTx/>
-              <a:buChar char="-"/>
-            </a:pPr>
-            <a:r>
-              <a:rPr lang="en-US" sz="1200" kern="1200" dirty="0">
-                <a:solidFill>
-                  <a:schemeClr val="tx1"/>
-                </a:solidFill>
-                <a:effectLst/>
-                <a:latin typeface="+mn-lt"/>
-                <a:ea typeface="+mn-ea"/>
-                <a:cs typeface="+mn-cs"/>
-              </a:rPr>
-              <a:t>From an administrative perspective, this presents a practical opportunity to reevaluate travel logistics, such as prioritizing charter flights for return trips, even if it requires trade-offs on the opening leg of a trip.</a:t>
+              <a:t>Because variables like RTL and CRTL did not meaningfully improve model performance, it suggests that accumulated load may be less informative than immediate recovery conditions.</a:t>
             </a:r>
           </a:p>
         </p:txBody>
@@ -4676,7 +4560,7 @@
                 <a:ea typeface="+mn-ea"/>
                 <a:cs typeface="+mn-cs"/>
               </a:rPr>
-              <a:t>Additionally, incorporating variables that account for external stressors, such as academic workload and opponent strength, would provide a more complete picture of performance variation.</a:t>
+              <a:t>Additionally, incorporating variables, such as academic workload and opponent strength, would provide a more complete picture of performance variation.</a:t>
             </a:r>
           </a:p>
           <a:p>
@@ -4712,7 +4596,7 @@
                 <a:ea typeface="+mn-ea"/>
                 <a:cs typeface="+mn-cs"/>
               </a:rPr>
-              <a:t>Overall, while predictive performance remains limited, this study establishes a foundation for recognizing how travel logistics impact athlete performance and highlights the importance of recovery-focused decision-making in athletics administration.</a:t>
+              <a:t>Overall, while predictive performance remains limited, this study establishes a foundation for recognizing how travel logistics impact athlete performance.</a:t>
             </a:r>
             <a:endParaRPr lang="en-US" dirty="0"/>
           </a:p>
